--- a/curso/pptx/S26.pptx
+++ b/curso/pptx/S26.pptx
@@ -6997,7 +6997,7 @@
                 </a:solidFill>
                 <a:latin typeface="Nunito Sans"/>
               </a:rPr>
-              <a:t>Sabe de </a:t>
+              <a:t>懂</a:t>
             </a:r>
             <a:r>
               <a:rPr sz="2800" b="1">
@@ -7006,7 +7006,7 @@
                 </a:solidFill>
                 <a:latin typeface="Nunito Sans"/>
               </a:rPr>
-              <a:t>su</a:t>
+              <a:t>他的</a:t>
             </a:r>
             <a:r>
               <a:rPr sz="2800" b="0">
@@ -7015,7 +7015,7 @@
                 </a:solidFill>
                 <a:latin typeface="Nunito Sans"/>
               </a:rPr>
-              <a:t> tema, no de todos</a:t>
+              <a:t>话题，不是所有话题</a:t>
             </a:r>
           </a:p>
           <a:p>
@@ -7040,7 +7040,7 @@
                 </a:solidFill>
                 <a:latin typeface="Nunito Sans"/>
               </a:rPr>
-              <a:t>Puede equivocarse, como todos</a:t>
+              <a:t>也可能犯错，和所有人一样</a:t>
             </a:r>
           </a:p>
           <a:p>
@@ -7065,7 +7065,7 @@
                 </a:solidFill>
                 <a:latin typeface="Nunito Sans"/>
               </a:rPr>
-              <a:t>Nos ahorra tener que comprobarlo todo nosotros</a:t>
+              <a:t>让我们不必自己什么都去检验</a:t>
             </a:r>
           </a:p>
         </p:txBody>
@@ -7659,7 +7659,7 @@
                 </a:solidFill>
                 <a:latin typeface="Nunito Sans"/>
               </a:rPr>
-              <a:t>Vale más que la opinión de un experto solo</a:t>
+              <a:t>比单独一位专家的观点更有分量</a:t>
             </a:r>
           </a:p>
           <a:p>
@@ -7684,7 +7684,7 @@
                 </a:solidFill>
                 <a:latin typeface="Nunito Sans"/>
               </a:rPr>
-              <a:t>Uno puede equivocarse; casi todos a la vez, es más raro</a:t>
+              <a:t>一个人可能出错；几乎所有人同时出错，就少见得多</a:t>
             </a:r>
           </a:p>
           <a:p>
@@ -7709,7 +7709,7 @@
                 </a:solidFill>
                 <a:latin typeface="Nunito Sans"/>
               </a:rPr>
-              <a:t>Ejemplo: la Tierra gira alrededor del Sol</a:t>
+              <a:t>例子：地球绕着太阳转</a:t>
             </a:r>
           </a:p>
         </p:txBody>

--- a/curso/pptx/S26.pptx
+++ b/curso/pptx/S26.pptx
@@ -4746,7 +4746,7 @@
                 </a:solidFill>
                 <a:latin typeface="Nunito Sans"/>
               </a:rPr>
-              <a:t>Omar 的儿科医生建议他接种一种疫苗。卫生部门和几乎所有的医生都这么说。</a:t>
+              <a:t>一个男孩的儿科医生建议他接种一种疫苗。卫生部门和几乎所有的医生都这么说。</a:t>
             </a:r>
           </a:p>
         </p:txBody>
